--- a/assets/pptx/catalog-516.pptx
+++ b/assets/pptx/catalog-516.pptx
@@ -3266,7 +3266,7 @@
                 <a:ea typeface="Ebrima"/>
                 <a:cs typeface="Ebrima"/>
               </a:rPr>
-              <a:t>ፍቅሩ ርህራሄው ምህረቱ (3x)</a:t>
+              <a:t>ፍቅሩ ርህራሄው ምህረቱ 3x</a:t>
             </a:r>
           </a:p>
         </p:txBody>
@@ -3696,7 +3696,7 @@
                 <a:ea typeface="Ebrima"/>
                 <a:cs typeface="Ebrima"/>
               </a:rPr>
-              <a:t>እርሱ ብቻ ብቻውን ነው (2x)</a:t>
+              <a:t>እርሱ ብቻ ብቻውን ነው 2x</a:t>
             </a:r>
           </a:p>
           <a:p>
@@ -3732,7 +3732,7 @@
                 <a:ea typeface="Ebrima"/>
                 <a:cs typeface="Ebrima"/>
               </a:rPr>
-              <a:t>አንተ ብቻ ብቻህን ነህ (2x)</a:t>
+              <a:t>አንተ ብቻ ብቻህን ነህ 2x</a:t>
             </a:r>
           </a:p>
           <a:p>
@@ -3974,7 +3974,7 @@
                 <a:ea typeface="Ebrima"/>
                 <a:cs typeface="Ebrima"/>
               </a:rPr>
-              <a:t>ኦ እደነቃለሁ (3x)</a:t>
+              <a:t>ኦ እደነቃለሁ 3x</a:t>
             </a:r>
           </a:p>
           <a:p>
@@ -3992,7 +3992,7 @@
                 <a:ea typeface="Ebrima"/>
                 <a:cs typeface="Ebrima"/>
               </a:rPr>
-              <a:t>እኔ እደነቃለሁ (3x)</a:t>
+              <a:t>እኔ እደነቃለሁ 3x</a:t>
             </a:r>
           </a:p>
         </p:txBody>
@@ -4113,7 +4113,7 @@
                 <a:ea typeface="Ebrima"/>
                 <a:cs typeface="Ebrima"/>
               </a:rPr>
-              <a:t>በምድር ስለሌለ ሃሃ (2x)</a:t>
+              <a:t>በምድር ስለሌለ ሃሃ 2x</a:t>
             </a:r>
           </a:p>
         </p:txBody>
